--- a/06-final-report/figures/fig-6-avg-wait-time.pptx
+++ b/06-final-report/figures/fig-6-avg-wait-time.pptx
@@ -1230,7 +1230,7 @@
                 <a:ea typeface="맑은 고딕" pitchFamily="34" charset="-122"/>
                 <a:cs typeface="맑은 고딕" pitchFamily="34" charset="-120"/>
               </a:rPr>
-              <a:t>기본 실험 500건 | 4개 테넌트 | 순차 도착</a:t>
+              <a:t>기본 실험 500건 | 4명 (등급별 1명) | 순차 도착</a:t>
             </a:r>
             <a:endParaRPr lang="en-US" sz="900" dirty="0"/>
           </a:p>
